--- a/eval/out/gates_slide4.pptx
+++ b/eval/out/gates_slide4.pptx
@@ -6405,7 +6405,7 @@
           </a:xfrm>
           <a:prstGeom prst="pie">
             <a:avLst>
-              <a:gd name="adj1" fmla="val -5400000"/>
+              <a:gd name="adj1" fmla="val 16200000"/>
               <a:gd name="adj2" fmla="val 5400000"/>
             </a:avLst>
           </a:prstGeom>

--- a/eval/out/gates_slide4.pptx
+++ b/eval/out/gates_slide4.pptx
@@ -3104,8 +3104,8 @@
         </p:nvSpPr>
         <p:spPr>
           <a:xfrm>
-            <a:off x="411480" y="511423"/>
-            <a:ext cx="11369040" cy="303033"/>
+            <a:off x="411480" y="274320"/>
+            <a:ext cx="11369040" cy="310608"/>
           </a:xfrm>
           <a:prstGeom prst="rect">
             <a:avLst/>
@@ -3120,7 +3120,7 @@
           <a:p>
             <a:pPr algn="l">
               <a:lnSpc>
-                <a:spcPts val="2386"/>
+                <a:spcPts val="2445"/>
               </a:lnSpc>
               <a:spcBef>
                 <a:spcPts val="0"/>
@@ -3288,7 +3288,7 @@
         <p:spPr>
           <a:xfrm>
             <a:off x="411480" y="1051560"/>
-            <a:ext cx="2485542" cy="171014"/>
+            <a:ext cx="2485542" cy="174603"/>
           </a:xfrm>
           <a:prstGeom prst="rect">
             <a:avLst/>
@@ -3318,14 +3318,14 @@
           </a:fontRef>
         </p:style>
         <p:txBody>
-          <a:bodyPr rtlCol="0" anchor="ctr" wrap="none" lIns="0" rIns="0" tIns="0" bIns="0">
+          <a:bodyPr rtlCol="0" anchor="ctr" wrap="none" lIns="22860" rIns="22860" tIns="0" bIns="0">
             <a:noAutofit/>
           </a:bodyPr>
           <a:lstStyle/>
           <a:p>
             <a:pPr algn="ctr">
               <a:lnSpc>
-                <a:spcPts val="1130"/>
+                <a:spcPts val="1158"/>
               </a:lnSpc>
               <a:spcBef>
                 <a:spcPts val="0"/>
@@ -3355,7 +3355,7 @@
         <p:spPr>
           <a:xfrm>
             <a:off x="2897022" y="1051560"/>
-            <a:ext cx="2485542" cy="171014"/>
+            <a:ext cx="2485542" cy="174603"/>
           </a:xfrm>
           <a:prstGeom prst="rect">
             <a:avLst/>
@@ -3385,14 +3385,14 @@
           </a:fontRef>
         </p:style>
         <p:txBody>
-          <a:bodyPr rtlCol="0" anchor="ctr" wrap="none" lIns="0" rIns="0" tIns="0" bIns="0">
+          <a:bodyPr rtlCol="0" anchor="ctr" wrap="none" lIns="22860" rIns="22860" tIns="0" bIns="0">
             <a:noAutofit/>
           </a:bodyPr>
           <a:lstStyle/>
           <a:p>
             <a:pPr algn="ctr">
               <a:lnSpc>
-                <a:spcPts val="1130"/>
+                <a:spcPts val="1158"/>
               </a:lnSpc>
               <a:spcBef>
                 <a:spcPts val="0"/>
@@ -3422,7 +3422,7 @@
         <p:spPr>
           <a:xfrm>
             <a:off x="5382564" y="1051560"/>
-            <a:ext cx="2485543" cy="171014"/>
+            <a:ext cx="2485543" cy="174603"/>
           </a:xfrm>
           <a:prstGeom prst="rect">
             <a:avLst/>
@@ -3452,14 +3452,14 @@
           </a:fontRef>
         </p:style>
         <p:txBody>
-          <a:bodyPr rtlCol="0" anchor="ctr" wrap="none" lIns="0" rIns="0" tIns="0" bIns="0">
+          <a:bodyPr rtlCol="0" anchor="ctr" wrap="none" lIns="22860" rIns="22860" tIns="0" bIns="0">
             <a:noAutofit/>
           </a:bodyPr>
           <a:lstStyle/>
           <a:p>
             <a:pPr algn="ctr">
               <a:lnSpc>
-                <a:spcPts val="1130"/>
+                <a:spcPts val="1158"/>
               </a:lnSpc>
               <a:spcBef>
                 <a:spcPts val="0"/>
@@ -3488,8 +3488,8 @@
         </p:nvSpPr>
         <p:spPr>
           <a:xfrm>
-            <a:off x="411480" y="1222574"/>
-            <a:ext cx="2485542" cy="171014"/>
+            <a:off x="411480" y="1226163"/>
+            <a:ext cx="2485542" cy="174603"/>
           </a:xfrm>
           <a:prstGeom prst="rect">
             <a:avLst/>
@@ -3519,14 +3519,14 @@
           </a:fontRef>
         </p:style>
         <p:txBody>
-          <a:bodyPr rtlCol="0" anchor="ctr" wrap="none" lIns="0" rIns="0" tIns="0" bIns="0">
+          <a:bodyPr rtlCol="0" anchor="ctr" wrap="none" lIns="22860" rIns="22860" tIns="0" bIns="0">
             <a:noAutofit/>
           </a:bodyPr>
           <a:lstStyle/>
           <a:p>
             <a:pPr algn="ctr">
               <a:lnSpc>
-                <a:spcPts val="1130"/>
+                <a:spcPts val="1158"/>
               </a:lnSpc>
               <a:spcBef>
                 <a:spcPts val="0"/>
@@ -3555,8 +3555,8 @@
         </p:nvSpPr>
         <p:spPr>
           <a:xfrm>
-            <a:off x="2897022" y="1222574"/>
-            <a:ext cx="2485542" cy="171014"/>
+            <a:off x="2897022" y="1226163"/>
+            <a:ext cx="2485542" cy="174603"/>
           </a:xfrm>
           <a:prstGeom prst="rect">
             <a:avLst/>
@@ -3586,14 +3586,14 @@
           </a:fontRef>
         </p:style>
         <p:txBody>
-          <a:bodyPr rtlCol="0" anchor="ctr" wrap="none" lIns="0" rIns="0" tIns="0" bIns="0">
+          <a:bodyPr rtlCol="0" anchor="ctr" wrap="none" lIns="22860" rIns="22860" tIns="0" bIns="0">
             <a:noAutofit/>
           </a:bodyPr>
           <a:lstStyle/>
           <a:p>
             <a:pPr algn="ctr">
               <a:lnSpc>
-                <a:spcPts val="1130"/>
+                <a:spcPts val="1158"/>
               </a:lnSpc>
               <a:spcBef>
                 <a:spcPts val="0"/>
@@ -3609,7 +3609,16 @@
                 </a:solidFill>
                 <a:latin typeface="Segoe UI"/>
               </a:rPr>
-              <a:t>7.0 Mn</a:t>
+              <a:t>7.0 </a:t>
+            </a:r>
+            <a:r>
+              <a:rPr sz="850" b="0" i="0">
+                <a:solidFill>
+                  <a:srgbClr val="2B2B2B"/>
+                </a:solidFill>
+                <a:latin typeface="Segoe UI"/>
+              </a:rPr>
+              <a:t>Mn</a:t>
             </a:r>
           </a:p>
         </p:txBody>
@@ -3622,8 +3631,8 @@
         </p:nvSpPr>
         <p:spPr>
           <a:xfrm>
-            <a:off x="5382564" y="1222574"/>
-            <a:ext cx="2485543" cy="171014"/>
+            <a:off x="5382564" y="1226163"/>
+            <a:ext cx="2485543" cy="174603"/>
           </a:xfrm>
           <a:prstGeom prst="rect">
             <a:avLst/>
@@ -3653,14 +3662,14 @@
           </a:fontRef>
         </p:style>
         <p:txBody>
-          <a:bodyPr rtlCol="0" anchor="ctr" wrap="none" lIns="0" rIns="0" tIns="0" bIns="0">
+          <a:bodyPr rtlCol="0" anchor="ctr" wrap="none" lIns="22860" rIns="22860" tIns="0" bIns="0">
             <a:noAutofit/>
           </a:bodyPr>
           <a:lstStyle/>
           <a:p>
             <a:pPr algn="ctr">
               <a:lnSpc>
-                <a:spcPts val="1130"/>
+                <a:spcPts val="1158"/>
               </a:lnSpc>
               <a:spcBef>
                 <a:spcPts val="0"/>
@@ -3676,7 +3685,16 @@
                 </a:solidFill>
                 <a:latin typeface="Segoe UI"/>
               </a:rPr>
-              <a:t>18.5 Mn</a:t>
+              <a:t>18.5 </a:t>
+            </a:r>
+            <a:r>
+              <a:rPr sz="850" b="0" i="0">
+                <a:solidFill>
+                  <a:srgbClr val="2B2B2B"/>
+                </a:solidFill>
+                <a:latin typeface="Segoe UI"/>
+              </a:rPr>
+              <a:t>Mn</a:t>
             </a:r>
           </a:p>
         </p:txBody>
@@ -3689,8 +3707,8 @@
         </p:nvSpPr>
         <p:spPr>
           <a:xfrm>
-            <a:off x="411480" y="1393588"/>
-            <a:ext cx="2485542" cy="171014"/>
+            <a:off x="411480" y="1400766"/>
+            <a:ext cx="2485542" cy="174603"/>
           </a:xfrm>
           <a:prstGeom prst="rect">
             <a:avLst/>
@@ -3720,14 +3738,14 @@
           </a:fontRef>
         </p:style>
         <p:txBody>
-          <a:bodyPr rtlCol="0" anchor="ctr" wrap="none" lIns="0" rIns="0" tIns="0" bIns="0">
+          <a:bodyPr rtlCol="0" anchor="ctr" wrap="none" lIns="22860" rIns="22860" tIns="0" bIns="0">
             <a:noAutofit/>
           </a:bodyPr>
           <a:lstStyle/>
           <a:p>
             <a:pPr algn="ctr">
               <a:lnSpc>
-                <a:spcPts val="1130"/>
+                <a:spcPts val="1158"/>
               </a:lnSpc>
               <a:spcBef>
                 <a:spcPts val="0"/>
@@ -3756,8 +3774,8 @@
         </p:nvSpPr>
         <p:spPr>
           <a:xfrm>
-            <a:off x="2897022" y="1393588"/>
-            <a:ext cx="2485542" cy="171014"/>
+            <a:off x="2897022" y="1400766"/>
+            <a:ext cx="2485542" cy="174603"/>
           </a:xfrm>
           <a:prstGeom prst="rect">
             <a:avLst/>
@@ -3787,14 +3805,14 @@
           </a:fontRef>
         </p:style>
         <p:txBody>
-          <a:bodyPr rtlCol="0" anchor="ctr" wrap="none" lIns="0" rIns="0" tIns="0" bIns="0">
+          <a:bodyPr rtlCol="0" anchor="ctr" wrap="none" lIns="22860" rIns="22860" tIns="0" bIns="0">
             <a:noAutofit/>
           </a:bodyPr>
           <a:lstStyle/>
           <a:p>
             <a:pPr algn="ctr">
               <a:lnSpc>
-                <a:spcPts val="1130"/>
+                <a:spcPts val="1158"/>
               </a:lnSpc>
               <a:spcBef>
                 <a:spcPts val="0"/>
@@ -3810,7 +3828,16 @@
                 </a:solidFill>
                 <a:latin typeface="Segoe UI"/>
               </a:rPr>
-              <a:t>1.1 Mn</a:t>
+              <a:t>1.1 </a:t>
+            </a:r>
+            <a:r>
+              <a:rPr sz="850" b="0" i="0">
+                <a:solidFill>
+                  <a:srgbClr val="2B2B2B"/>
+                </a:solidFill>
+                <a:latin typeface="Segoe UI"/>
+              </a:rPr>
+              <a:t>Mn</a:t>
             </a:r>
           </a:p>
         </p:txBody>
@@ -3823,8 +3850,8 @@
         </p:nvSpPr>
         <p:spPr>
           <a:xfrm>
-            <a:off x="5382564" y="1393588"/>
-            <a:ext cx="2485543" cy="171014"/>
+            <a:off x="5382564" y="1400766"/>
+            <a:ext cx="2485543" cy="174603"/>
           </a:xfrm>
           <a:prstGeom prst="rect">
             <a:avLst/>
@@ -3854,14 +3881,14 @@
           </a:fontRef>
         </p:style>
         <p:txBody>
-          <a:bodyPr rtlCol="0" anchor="ctr" wrap="none" lIns="0" rIns="0" tIns="0" bIns="0">
+          <a:bodyPr rtlCol="0" anchor="ctr" wrap="none" lIns="22860" rIns="22860" tIns="0" bIns="0">
             <a:noAutofit/>
           </a:bodyPr>
           <a:lstStyle/>
           <a:p>
             <a:pPr algn="ctr">
               <a:lnSpc>
-                <a:spcPts val="1130"/>
+                <a:spcPts val="1158"/>
               </a:lnSpc>
               <a:spcBef>
                 <a:spcPts val="0"/>
@@ -3877,7 +3904,16 @@
                 </a:solidFill>
                 <a:latin typeface="Segoe UI"/>
               </a:rPr>
-              <a:t>1.2 Mn</a:t>
+              <a:t>1.2 </a:t>
+            </a:r>
+            <a:r>
+              <a:rPr sz="850" b="0" i="0">
+                <a:solidFill>
+                  <a:srgbClr val="2B2B2B"/>
+                </a:solidFill>
+                <a:latin typeface="Segoe UI"/>
+              </a:rPr>
+              <a:t>Mn</a:t>
             </a:r>
           </a:p>
         </p:txBody>
@@ -3890,8 +3926,8 @@
         </p:nvSpPr>
         <p:spPr>
           <a:xfrm>
-            <a:off x="411480" y="1564602"/>
-            <a:ext cx="2485542" cy="171014"/>
+            <a:off x="411480" y="1575369"/>
+            <a:ext cx="2485542" cy="174603"/>
           </a:xfrm>
           <a:prstGeom prst="rect">
             <a:avLst/>
@@ -3921,14 +3957,14 @@
           </a:fontRef>
         </p:style>
         <p:txBody>
-          <a:bodyPr rtlCol="0" anchor="ctr" wrap="none" lIns="0" rIns="0" tIns="0" bIns="0">
+          <a:bodyPr rtlCol="0" anchor="ctr" wrap="none" lIns="22860" rIns="22860" tIns="0" bIns="0">
             <a:noAutofit/>
           </a:bodyPr>
           <a:lstStyle/>
           <a:p>
             <a:pPr algn="ctr">
               <a:lnSpc>
-                <a:spcPts val="1130"/>
+                <a:spcPts val="1158"/>
               </a:lnSpc>
               <a:spcBef>
                 <a:spcPts val="0"/>
@@ -3957,8 +3993,8 @@
         </p:nvSpPr>
         <p:spPr>
           <a:xfrm>
-            <a:off x="2897022" y="1564602"/>
-            <a:ext cx="2485542" cy="171014"/>
+            <a:off x="2897022" y="1575369"/>
+            <a:ext cx="2485542" cy="174603"/>
           </a:xfrm>
           <a:prstGeom prst="rect">
             <a:avLst/>
@@ -3988,14 +4024,14 @@
           </a:fontRef>
         </p:style>
         <p:txBody>
-          <a:bodyPr rtlCol="0" anchor="ctr" wrap="none" lIns="0" rIns="0" tIns="0" bIns="0">
+          <a:bodyPr rtlCol="0" anchor="ctr" wrap="none" lIns="22860" rIns="22860" tIns="0" bIns="0">
             <a:noAutofit/>
           </a:bodyPr>
           <a:lstStyle/>
           <a:p>
             <a:pPr algn="ctr">
               <a:lnSpc>
-                <a:spcPts val="1130"/>
+                <a:spcPts val="1158"/>
               </a:lnSpc>
               <a:spcBef>
                 <a:spcPts val="0"/>
@@ -4011,7 +4047,16 @@
                 </a:solidFill>
                 <a:latin typeface="Segoe UI"/>
               </a:rPr>
-              <a:t>2.0 Mn</a:t>
+              <a:t>2.0 </a:t>
+            </a:r>
+            <a:r>
+              <a:rPr sz="850" b="0" i="0">
+                <a:solidFill>
+                  <a:srgbClr val="2B2B2B"/>
+                </a:solidFill>
+                <a:latin typeface="Segoe UI"/>
+              </a:rPr>
+              <a:t>Mn</a:t>
             </a:r>
           </a:p>
         </p:txBody>
@@ -4024,8 +4069,8 @@
         </p:nvSpPr>
         <p:spPr>
           <a:xfrm>
-            <a:off x="5382564" y="1564602"/>
-            <a:ext cx="2485543" cy="171014"/>
+            <a:off x="5382564" y="1575369"/>
+            <a:ext cx="2485543" cy="174603"/>
           </a:xfrm>
           <a:prstGeom prst="rect">
             <a:avLst/>
@@ -4055,14 +4100,14 @@
           </a:fontRef>
         </p:style>
         <p:txBody>
-          <a:bodyPr rtlCol="0" anchor="ctr" wrap="none" lIns="0" rIns="0" tIns="0" bIns="0">
+          <a:bodyPr rtlCol="0" anchor="ctr" wrap="none" lIns="22860" rIns="22860" tIns="0" bIns="0">
             <a:noAutofit/>
           </a:bodyPr>
           <a:lstStyle/>
           <a:p>
             <a:pPr algn="ctr">
               <a:lnSpc>
-                <a:spcPts val="1130"/>
+                <a:spcPts val="1158"/>
               </a:lnSpc>
               <a:spcBef>
                 <a:spcPts val="0"/>
@@ -4078,7 +4123,16 @@
                 </a:solidFill>
                 <a:latin typeface="Segoe UI"/>
               </a:rPr>
-              <a:t>7.6 Mn</a:t>
+              <a:t>7.6 </a:t>
+            </a:r>
+            <a:r>
+              <a:rPr sz="850" b="0" i="0">
+                <a:solidFill>
+                  <a:srgbClr val="2B2B2B"/>
+                </a:solidFill>
+                <a:latin typeface="Segoe UI"/>
+              </a:rPr>
+              <a:t>Mn</a:t>
             </a:r>
           </a:p>
         </p:txBody>
@@ -4091,8 +4145,8 @@
         </p:nvSpPr>
         <p:spPr>
           <a:xfrm>
-            <a:off x="411480" y="1735616"/>
-            <a:ext cx="2485542" cy="171014"/>
+            <a:off x="411480" y="1749972"/>
+            <a:ext cx="2485542" cy="174603"/>
           </a:xfrm>
           <a:prstGeom prst="rect">
             <a:avLst/>
@@ -4122,14 +4176,14 @@
           </a:fontRef>
         </p:style>
         <p:txBody>
-          <a:bodyPr rtlCol="0" anchor="ctr" wrap="none" lIns="0" rIns="0" tIns="0" bIns="0">
+          <a:bodyPr rtlCol="0" anchor="ctr" wrap="none" lIns="22860" rIns="22860" tIns="0" bIns="0">
             <a:noAutofit/>
           </a:bodyPr>
           <a:lstStyle/>
           <a:p>
             <a:pPr algn="ctr">
               <a:lnSpc>
-                <a:spcPts val="1130"/>
+                <a:spcPts val="1158"/>
               </a:lnSpc>
               <a:spcBef>
                 <a:spcPts val="0"/>
@@ -4158,8 +4212,8 @@
         </p:nvSpPr>
         <p:spPr>
           <a:xfrm>
-            <a:off x="2897022" y="1735616"/>
-            <a:ext cx="2485542" cy="171014"/>
+            <a:off x="2897022" y="1749972"/>
+            <a:ext cx="2485542" cy="174603"/>
           </a:xfrm>
           <a:prstGeom prst="rect">
             <a:avLst/>
@@ -4189,14 +4243,14 @@
           </a:fontRef>
         </p:style>
         <p:txBody>
-          <a:bodyPr rtlCol="0" anchor="ctr" wrap="none" lIns="0" rIns="0" tIns="0" bIns="0">
+          <a:bodyPr rtlCol="0" anchor="ctr" wrap="none" lIns="22860" rIns="22860" tIns="0" bIns="0">
             <a:noAutofit/>
           </a:bodyPr>
           <a:lstStyle/>
           <a:p>
             <a:pPr algn="ctr">
               <a:lnSpc>
-                <a:spcPts val="1130"/>
+                <a:spcPts val="1158"/>
               </a:lnSpc>
               <a:spcBef>
                 <a:spcPts val="0"/>
@@ -4212,7 +4266,16 @@
                 </a:solidFill>
                 <a:latin typeface="Segoe UI"/>
               </a:rPr>
-              <a:t>0.4 Mn</a:t>
+              <a:t>0.4 </a:t>
+            </a:r>
+            <a:r>
+              <a:rPr sz="850" b="0" i="0">
+                <a:solidFill>
+                  <a:srgbClr val="2B2B2B"/>
+                </a:solidFill>
+                <a:latin typeface="Segoe UI"/>
+              </a:rPr>
+              <a:t>Mn</a:t>
             </a:r>
           </a:p>
         </p:txBody>
@@ -4225,8 +4288,8 @@
         </p:nvSpPr>
         <p:spPr>
           <a:xfrm>
-            <a:off x="5382564" y="1735616"/>
-            <a:ext cx="2485543" cy="171014"/>
+            <a:off x="5382564" y="1749972"/>
+            <a:ext cx="2485543" cy="174603"/>
           </a:xfrm>
           <a:prstGeom prst="rect">
             <a:avLst/>
@@ -4256,14 +4319,14 @@
           </a:fontRef>
         </p:style>
         <p:txBody>
-          <a:bodyPr rtlCol="0" anchor="ctr" wrap="none" lIns="0" rIns="0" tIns="0" bIns="0">
+          <a:bodyPr rtlCol="0" anchor="ctr" wrap="none" lIns="22860" rIns="22860" tIns="0" bIns="0">
             <a:noAutofit/>
           </a:bodyPr>
           <a:lstStyle/>
           <a:p>
             <a:pPr algn="ctr">
               <a:lnSpc>
-                <a:spcPts val="1130"/>
+                <a:spcPts val="1158"/>
               </a:lnSpc>
               <a:spcBef>
                 <a:spcPts val="0"/>
@@ -4279,7 +4342,16 @@
                 </a:solidFill>
                 <a:latin typeface="Segoe UI"/>
               </a:rPr>
-              <a:t>10.5 Mn</a:t>
+              <a:t>10.5 </a:t>
+            </a:r>
+            <a:r>
+              <a:rPr sz="850" b="0" i="0">
+                <a:solidFill>
+                  <a:srgbClr val="2B2B2B"/>
+                </a:solidFill>
+                <a:latin typeface="Segoe UI"/>
+              </a:rPr>
+              <a:t>Mn</a:t>
             </a:r>
           </a:p>
         </p:txBody>
@@ -4292,8 +4364,8 @@
         </p:nvSpPr>
         <p:spPr>
           <a:xfrm>
-            <a:off x="411480" y="1906630"/>
-            <a:ext cx="2485542" cy="171014"/>
+            <a:off x="411480" y="1924575"/>
+            <a:ext cx="2485542" cy="174603"/>
           </a:xfrm>
           <a:prstGeom prst="rect">
             <a:avLst/>
@@ -4323,14 +4395,14 @@
           </a:fontRef>
         </p:style>
         <p:txBody>
-          <a:bodyPr rtlCol="0" anchor="ctr" wrap="none" lIns="0" rIns="0" tIns="0" bIns="0">
+          <a:bodyPr rtlCol="0" anchor="ctr" wrap="none" lIns="22860" rIns="22860" tIns="0" bIns="0">
             <a:noAutofit/>
           </a:bodyPr>
           <a:lstStyle/>
           <a:p>
             <a:pPr algn="ctr">
               <a:lnSpc>
-                <a:spcPts val="1130"/>
+                <a:spcPts val="1158"/>
               </a:lnSpc>
               <a:spcBef>
                 <a:spcPts val="0"/>
@@ -4359,8 +4431,8 @@
         </p:nvSpPr>
         <p:spPr>
           <a:xfrm>
-            <a:off x="2897022" y="1906630"/>
-            <a:ext cx="2485542" cy="171014"/>
+            <a:off x="2897022" y="1924575"/>
+            <a:ext cx="2485542" cy="174603"/>
           </a:xfrm>
           <a:prstGeom prst="rect">
             <a:avLst/>
@@ -4390,14 +4462,14 @@
           </a:fontRef>
         </p:style>
         <p:txBody>
-          <a:bodyPr rtlCol="0" anchor="ctr" wrap="none" lIns="0" rIns="0" tIns="0" bIns="0">
+          <a:bodyPr rtlCol="0" anchor="ctr" wrap="none" lIns="22860" rIns="22860" tIns="0" bIns="0">
             <a:noAutofit/>
           </a:bodyPr>
           <a:lstStyle/>
           <a:p>
             <a:pPr algn="ctr">
               <a:lnSpc>
-                <a:spcPts val="1130"/>
+                <a:spcPts val="1158"/>
               </a:lnSpc>
               <a:spcBef>
                 <a:spcPts val="0"/>
@@ -4413,7 +4485,16 @@
                 </a:solidFill>
                 <a:latin typeface="Segoe UI"/>
               </a:rPr>
-              <a:t>10.6 Mn</a:t>
+              <a:t>10.6 </a:t>
+            </a:r>
+            <a:r>
+              <a:rPr sz="850" b="0" i="0">
+                <a:solidFill>
+                  <a:srgbClr val="2B2B2B"/>
+                </a:solidFill>
+                <a:latin typeface="Segoe UI"/>
+              </a:rPr>
+              <a:t>Mn</a:t>
             </a:r>
           </a:p>
         </p:txBody>
@@ -4426,8 +4507,8 @@
         </p:nvSpPr>
         <p:spPr>
           <a:xfrm>
-            <a:off x="5382564" y="1906630"/>
-            <a:ext cx="2485543" cy="171014"/>
+            <a:off x="5382564" y="1924575"/>
+            <a:ext cx="2485543" cy="174603"/>
           </a:xfrm>
           <a:prstGeom prst="rect">
             <a:avLst/>
@@ -4457,14 +4538,14 @@
           </a:fontRef>
         </p:style>
         <p:txBody>
-          <a:bodyPr rtlCol="0" anchor="ctr" wrap="none" lIns="0" rIns="0" tIns="0" bIns="0">
+          <a:bodyPr rtlCol="0" anchor="ctr" wrap="none" lIns="22860" rIns="22860" tIns="0" bIns="0">
             <a:noAutofit/>
           </a:bodyPr>
           <a:lstStyle/>
           <a:p>
             <a:pPr algn="ctr">
               <a:lnSpc>
-                <a:spcPts val="1130"/>
+                <a:spcPts val="1158"/>
               </a:lnSpc>
               <a:spcBef>
                 <a:spcPts val="0"/>
@@ -4480,7 +4561,16 @@
                 </a:solidFill>
                 <a:latin typeface="Segoe UI"/>
               </a:rPr>
-              <a:t>37.7 Mn</a:t>
+              <a:t>37.7 </a:t>
+            </a:r>
+            <a:r>
+              <a:rPr sz="850" b="0" i="0">
+                <a:solidFill>
+                  <a:srgbClr val="2B2B2B"/>
+                </a:solidFill>
+                <a:latin typeface="Segoe UI"/>
+              </a:rPr>
+              <a:t>Mn</a:t>
             </a:r>
           </a:p>
         </p:txBody>
@@ -4494,7 +4584,7 @@
         <p:spPr>
           <a:xfrm>
             <a:off x="7904683" y="1051560"/>
-            <a:ext cx="201168" cy="1026084"/>
+            <a:ext cx="201168" cy="1047618"/>
           </a:xfrm>
           <a:prstGeom prst="rightBrace">
             <a:avLst/>
@@ -4538,7 +4628,7 @@
         <p:spPr>
           <a:xfrm>
             <a:off x="8142427" y="1051560"/>
-            <a:ext cx="3638093" cy="1026084"/>
+            <a:ext cx="3638093" cy="1047618"/>
           </a:xfrm>
           <a:prstGeom prst="rect">
             <a:avLst/>
@@ -4553,7 +4643,7 @@
           <a:p>
             <a:pPr algn="l">
               <a:lnSpc>
-                <a:spcPts val="1928"/>
+                <a:spcPts val="1976"/>
               </a:lnSpc>
               <a:spcBef>
                 <a:spcPts val="0"/>
@@ -4638,7 +4728,7 @@
           <a:p>
             <a:pPr algn="l">
               <a:lnSpc>
-                <a:spcPts val="1928"/>
+                <a:spcPts val="1976"/>
               </a:lnSpc>
               <a:spcBef>
                 <a:spcPts val="0"/>
@@ -4694,7 +4784,7 @@
         </p:nvSpPr>
         <p:spPr>
           <a:xfrm>
-            <a:off x="411480" y="2132508"/>
+            <a:off x="411480" y="2154042"/>
             <a:ext cx="11369040" cy="548640"/>
           </a:xfrm>
           <a:prstGeom prst="rect">
@@ -4738,7 +4828,7 @@
         </p:nvSpPr>
         <p:spPr>
           <a:xfrm>
-            <a:off x="457200" y="2155368"/>
+            <a:off x="457200" y="2176902"/>
             <a:ext cx="502920" cy="502920"/>
           </a:xfrm>
           <a:prstGeom prst="roundRect">
@@ -4792,7 +4882,7 @@
         </p:blipFill>
         <p:spPr>
           <a:xfrm>
-            <a:off x="577901" y="2276069"/>
+            <a:off x="577901" y="2297603"/>
             <a:ext cx="261518" cy="261518"/>
           </a:xfrm>
           <a:prstGeom prst="rect">
@@ -4808,7 +4898,7 @@
         </p:nvSpPr>
         <p:spPr>
           <a:xfrm>
-            <a:off x="1014984" y="2132508"/>
+            <a:off x="1014984" y="2154042"/>
             <a:ext cx="430069" cy="548640"/>
           </a:xfrm>
           <a:prstGeom prst="rect">
@@ -4850,8 +4940,8 @@
         </p:nvSpPr>
         <p:spPr>
           <a:xfrm>
-            <a:off x="1445053" y="2322368"/>
-            <a:ext cx="10289747" cy="168920"/>
+            <a:off x="1445053" y="2341790"/>
+            <a:ext cx="10289747" cy="173143"/>
           </a:xfrm>
           <a:prstGeom prst="rect">
             <a:avLst/>
@@ -4866,7 +4956,7 @@
           <a:p>
             <a:pPr algn="l">
               <a:lnSpc>
-                <a:spcPts val="1330"/>
+                <a:spcPts val="1363"/>
               </a:lnSpc>
               <a:spcBef>
                 <a:spcPts val="0"/>
@@ -4931,7 +5021,7 @@
         </p:nvSpPr>
         <p:spPr>
           <a:xfrm>
-            <a:off x="411480" y="2708580"/>
+            <a:off x="411480" y="2730114"/>
             <a:ext cx="11369040" cy="548640"/>
           </a:xfrm>
           <a:prstGeom prst="rect">
@@ -4975,7 +5065,7 @@
         </p:nvSpPr>
         <p:spPr>
           <a:xfrm>
-            <a:off x="457200" y="2731440"/>
+            <a:off x="457200" y="2752974"/>
             <a:ext cx="502920" cy="502920"/>
           </a:xfrm>
           <a:prstGeom prst="roundRect">
@@ -5029,7 +5119,7 @@
         </p:blipFill>
         <p:spPr>
           <a:xfrm>
-            <a:off x="577901" y="2852141"/>
+            <a:off x="577901" y="2873675"/>
             <a:ext cx="261518" cy="261518"/>
           </a:xfrm>
           <a:prstGeom prst="rect">
@@ -5045,7 +5135,7 @@
         </p:nvSpPr>
         <p:spPr>
           <a:xfrm>
-            <a:off x="1014984" y="2708580"/>
+            <a:off x="1014984" y="2730114"/>
             <a:ext cx="835811" cy="548640"/>
           </a:xfrm>
           <a:prstGeom prst="rect">
@@ -5087,8 +5177,8 @@
         </p:nvSpPr>
         <p:spPr>
           <a:xfrm>
-            <a:off x="1850795" y="2898440"/>
-            <a:ext cx="9884005" cy="168920"/>
+            <a:off x="1850795" y="2917862"/>
+            <a:ext cx="9884005" cy="173143"/>
           </a:xfrm>
           <a:prstGeom prst="rect">
             <a:avLst/>
@@ -5103,7 +5193,7 @@
           <a:p>
             <a:pPr algn="l">
               <a:lnSpc>
-                <a:spcPts val="1330"/>
+                <a:spcPts val="1363"/>
               </a:lnSpc>
               <a:spcBef>
                 <a:spcPts val="0"/>
@@ -5186,7 +5276,7 @@
         </p:nvSpPr>
         <p:spPr>
           <a:xfrm>
-            <a:off x="411480" y="3284652"/>
+            <a:off x="411480" y="3306186"/>
             <a:ext cx="11369040" cy="548640"/>
           </a:xfrm>
           <a:prstGeom prst="rect">
@@ -5230,7 +5320,7 @@
         </p:nvSpPr>
         <p:spPr>
           <a:xfrm>
-            <a:off x="457200" y="3307512"/>
+            <a:off x="457200" y="3329046"/>
             <a:ext cx="502920" cy="502920"/>
           </a:xfrm>
           <a:prstGeom prst="roundRect">
@@ -5284,7 +5374,7 @@
         </p:blipFill>
         <p:spPr>
           <a:xfrm>
-            <a:off x="577901" y="3428213"/>
+            <a:off x="577901" y="3449747"/>
             <a:ext cx="261518" cy="261518"/>
           </a:xfrm>
           <a:prstGeom prst="rect">
@@ -5300,7 +5390,7 @@
         </p:nvSpPr>
         <p:spPr>
           <a:xfrm>
-            <a:off x="1014984" y="3284652"/>
+            <a:off x="1014984" y="3306186"/>
             <a:ext cx="548201" cy="548640"/>
           </a:xfrm>
           <a:prstGeom prst="rect">
@@ -5342,8 +5432,8 @@
         </p:nvSpPr>
         <p:spPr>
           <a:xfrm>
-            <a:off x="1563185" y="3474512"/>
-            <a:ext cx="10171615" cy="168920"/>
+            <a:off x="1563185" y="3493934"/>
+            <a:ext cx="10171615" cy="173143"/>
           </a:xfrm>
           <a:prstGeom prst="rect">
             <a:avLst/>
@@ -5358,7 +5448,7 @@
           <a:p>
             <a:pPr algn="l">
               <a:lnSpc>
-                <a:spcPts val="1330"/>
+                <a:spcPts val="1363"/>
               </a:lnSpc>
               <a:spcBef>
                 <a:spcPts val="0"/>
@@ -5441,8 +5531,8 @@
         </p:nvSpPr>
         <p:spPr>
           <a:xfrm>
-            <a:off x="411480" y="3915588"/>
-            <a:ext cx="2237232" cy="1175370"/>
+            <a:off x="411480" y="3937122"/>
+            <a:ext cx="2237232" cy="1179593"/>
           </a:xfrm>
           <a:prstGeom prst="rect">
             <a:avLst/>
@@ -5483,7 +5573,7 @@
           <a:p>
             <a:pPr algn="ctr">
               <a:lnSpc>
-                <a:spcPts val="1995"/>
+                <a:spcPts val="2044"/>
               </a:lnSpc>
               <a:spcBef>
                 <a:spcPts val="0"/>
@@ -5527,7 +5617,7 @@
           <a:p>
             <a:pPr algn="ctr">
               <a:lnSpc>
-                <a:spcPts val="1130"/>
+                <a:spcPts val="1158"/>
               </a:lnSpc>
               <a:spcBef>
                 <a:spcPts val="0"/>
@@ -5583,8 +5673,8 @@
         </p:nvSpPr>
         <p:spPr>
           <a:xfrm>
-            <a:off x="2694432" y="3915588"/>
-            <a:ext cx="2237232" cy="1175370"/>
+            <a:off x="2694432" y="3937122"/>
+            <a:ext cx="2237232" cy="1179593"/>
           </a:xfrm>
           <a:prstGeom prst="rect">
             <a:avLst/>
@@ -5625,7 +5715,7 @@
           <a:p>
             <a:pPr algn="ctr">
               <a:lnSpc>
-                <a:spcPts val="1995"/>
+                <a:spcPts val="2044"/>
               </a:lnSpc>
               <a:spcBef>
                 <a:spcPts val="0"/>
@@ -5669,7 +5759,7 @@
           <a:p>
             <a:pPr algn="ctr">
               <a:lnSpc>
-                <a:spcPts val="1130"/>
+                <a:spcPts val="1158"/>
               </a:lnSpc>
               <a:spcBef>
                 <a:spcPts val="0"/>
@@ -5743,8 +5833,8 @@
         </p:nvSpPr>
         <p:spPr>
           <a:xfrm>
-            <a:off x="4977384" y="3915588"/>
-            <a:ext cx="2237232" cy="1175370"/>
+            <a:off x="4977384" y="3937122"/>
+            <a:ext cx="2237232" cy="1179593"/>
           </a:xfrm>
           <a:prstGeom prst="rect">
             <a:avLst/>
@@ -5785,7 +5875,7 @@
           <a:p>
             <a:pPr algn="ctr">
               <a:lnSpc>
-                <a:spcPts val="1995"/>
+                <a:spcPts val="2044"/>
               </a:lnSpc>
               <a:spcBef>
                 <a:spcPts val="0"/>
@@ -5829,7 +5919,7 @@
           <a:p>
             <a:pPr algn="ctr">
               <a:lnSpc>
-                <a:spcPts val="1130"/>
+                <a:spcPts val="1158"/>
               </a:lnSpc>
               <a:spcBef>
                 <a:spcPts val="0"/>
@@ -5894,8 +5984,8 @@
         </p:nvSpPr>
         <p:spPr>
           <a:xfrm>
-            <a:off x="7260336" y="3915588"/>
-            <a:ext cx="2237232" cy="1175370"/>
+            <a:off x="7260336" y="3937122"/>
+            <a:ext cx="2237232" cy="1179593"/>
           </a:xfrm>
           <a:prstGeom prst="rect">
             <a:avLst/>
@@ -5944,8 +6034,8 @@
         </p:nvSpPr>
         <p:spPr>
           <a:xfrm>
-            <a:off x="7315200" y="4223700"/>
-            <a:ext cx="2127504" cy="168920"/>
+            <a:off x="7315200" y="4241328"/>
+            <a:ext cx="2127504" cy="173143"/>
           </a:xfrm>
           <a:prstGeom prst="rect">
             <a:avLst/>
@@ -5960,7 +6050,7 @@
           <a:p>
             <a:pPr algn="ctr">
               <a:lnSpc>
-                <a:spcPts val="1330"/>
+                <a:spcPts val="1363"/>
               </a:lnSpc>
               <a:spcBef>
                 <a:spcPts val="0"/>
@@ -6007,8 +6097,8 @@
         </p:nvSpPr>
         <p:spPr>
           <a:xfrm>
-            <a:off x="7315200" y="4420052"/>
-            <a:ext cx="2127504" cy="168920"/>
+            <a:off x="7315200" y="4441903"/>
+            <a:ext cx="2127504" cy="173143"/>
           </a:xfrm>
           <a:prstGeom prst="rect">
             <a:avLst/>
@@ -6023,7 +6113,7 @@
           <a:p>
             <a:pPr algn="l">
               <a:lnSpc>
-                <a:spcPts val="1330"/>
+                <a:spcPts val="1363"/>
               </a:lnSpc>
               <a:spcBef>
                 <a:spcPts val="0"/>
@@ -6070,8 +6160,8 @@
         </p:nvSpPr>
         <p:spPr>
           <a:xfrm>
-            <a:off x="7315200" y="4611832"/>
-            <a:ext cx="2127504" cy="171014"/>
+            <a:off x="7315200" y="4637906"/>
+            <a:ext cx="2127504" cy="174603"/>
           </a:xfrm>
           <a:prstGeom prst="roundRect">
             <a:avLst>
@@ -6116,8 +6206,8 @@
         </p:nvSpPr>
         <p:spPr>
           <a:xfrm>
-            <a:off x="7315200" y="4611832"/>
-            <a:ext cx="1106302" cy="171014"/>
+            <a:off x="7315200" y="4637906"/>
+            <a:ext cx="1106302" cy="174603"/>
           </a:xfrm>
           <a:prstGeom prst="roundRect">
             <a:avLst>
@@ -6162,8 +6252,8 @@
         </p:nvSpPr>
         <p:spPr>
           <a:xfrm>
-            <a:off x="7315200" y="4611832"/>
-            <a:ext cx="1106302" cy="171014"/>
+            <a:off x="7315200" y="4637906"/>
+            <a:ext cx="1106302" cy="174603"/>
           </a:xfrm>
           <a:prstGeom prst="rect">
             <a:avLst/>
@@ -6178,7 +6268,7 @@
           <a:p>
             <a:pPr algn="ctr">
               <a:lnSpc>
-                <a:spcPts val="1130"/>
+                <a:spcPts val="1158"/>
               </a:lnSpc>
               <a:spcBef>
                 <a:spcPts val="0"/>
@@ -6207,8 +6297,8 @@
         </p:nvSpPr>
         <p:spPr>
           <a:xfrm>
-            <a:off x="7315200" y="4611832"/>
-            <a:ext cx="2127504" cy="171014"/>
+            <a:off x="7315200" y="4637906"/>
+            <a:ext cx="2127504" cy="174603"/>
           </a:xfrm>
           <a:prstGeom prst="rect">
             <a:avLst/>
@@ -6223,7 +6313,7 @@
           <a:p>
             <a:pPr algn="r">
               <a:lnSpc>
-                <a:spcPts val="1130"/>
+                <a:spcPts val="1158"/>
               </a:lnSpc>
               <a:spcBef>
                 <a:spcPts val="0"/>
@@ -6252,8 +6342,8 @@
         </p:nvSpPr>
         <p:spPr>
           <a:xfrm>
-            <a:off x="9543288" y="3915588"/>
-            <a:ext cx="2237232" cy="1175370"/>
+            <a:off x="9543288" y="3937122"/>
+            <a:ext cx="2237232" cy="1179593"/>
           </a:xfrm>
           <a:prstGeom prst="rect">
             <a:avLst/>
@@ -6302,8 +6392,8 @@
         </p:nvSpPr>
         <p:spPr>
           <a:xfrm>
-            <a:off x="9598152" y="3970452"/>
-            <a:ext cx="2127504" cy="168920"/>
+            <a:off x="9598152" y="3991986"/>
+            <a:ext cx="2127504" cy="173143"/>
           </a:xfrm>
           <a:prstGeom prst="rect">
             <a:avLst/>
@@ -6318,7 +6408,7 @@
           <a:p>
             <a:pPr algn="ctr">
               <a:lnSpc>
-                <a:spcPts val="1330"/>
+                <a:spcPts val="1363"/>
               </a:lnSpc>
               <a:spcBef>
                 <a:spcPts val="0"/>
@@ -6356,7 +6446,7 @@
         </p:nvSpPr>
         <p:spPr>
           <a:xfrm>
-            <a:off x="9598152" y="4166804"/>
+            <a:off x="9598152" y="4192561"/>
             <a:ext cx="851002" cy="851002"/>
           </a:xfrm>
           <a:prstGeom prst="ellipse">
@@ -6400,7 +6490,7 @@
         </p:nvSpPr>
         <p:spPr>
           <a:xfrm>
-            <a:off x="9598152" y="4166804"/>
+            <a:off x="9598152" y="4192561"/>
             <a:ext cx="851002" cy="851002"/>
           </a:xfrm>
           <a:prstGeom prst="pie">
@@ -6447,7 +6537,7 @@
         </p:nvSpPr>
         <p:spPr>
           <a:xfrm>
-            <a:off x="9789627" y="4358279"/>
+            <a:off x="9789627" y="4384036"/>
             <a:ext cx="468051" cy="468051"/>
           </a:xfrm>
           <a:prstGeom prst="ellipse">
@@ -6491,7 +6581,7 @@
         </p:nvSpPr>
         <p:spPr>
           <a:xfrm>
-            <a:off x="9598152" y="4166804"/>
+            <a:off x="9598152" y="4192561"/>
             <a:ext cx="851002" cy="851002"/>
           </a:xfrm>
           <a:prstGeom prst="rect">
@@ -6507,7 +6597,7 @@
           <a:p>
             <a:pPr algn="ctr">
               <a:lnSpc>
-                <a:spcPts val="1995"/>
+                <a:spcPts val="2044"/>
               </a:lnSpc>
               <a:spcBef>
                 <a:spcPts val="0"/>
@@ -6536,7 +6626,7 @@
         </p:nvSpPr>
         <p:spPr>
           <a:xfrm>
-            <a:off x="10485730" y="4166804"/>
+            <a:off x="10485730" y="4192561"/>
             <a:ext cx="1239926" cy="851002"/>
           </a:xfrm>
           <a:prstGeom prst="rect">
@@ -6552,7 +6642,7 @@
           <a:p>
             <a:pPr algn="l">
               <a:lnSpc>
-                <a:spcPts val="1330"/>
+                <a:spcPts val="1363"/>
               </a:lnSpc>
               <a:spcBef>
                 <a:spcPts val="0"/>
@@ -6599,7 +6689,7 @@
         </p:nvSpPr>
         <p:spPr>
           <a:xfrm>
-            <a:off x="411480" y="5173254"/>
+            <a:off x="411480" y="5199011"/>
             <a:ext cx="4774997" cy="914400"/>
           </a:xfrm>
           <a:prstGeom prst="rect">
@@ -6643,7 +6733,7 @@
         </p:nvSpPr>
         <p:spPr>
           <a:xfrm>
-            <a:off x="466344" y="5228118"/>
+            <a:off x="466344" y="5253875"/>
             <a:ext cx="4665269" cy="804672"/>
           </a:xfrm>
           <a:prstGeom prst="rect">
@@ -6659,7 +6749,7 @@
           <a:p>
             <a:pPr algn="l">
               <a:lnSpc>
-                <a:spcPts val="1928"/>
+                <a:spcPts val="1976"/>
               </a:lnSpc>
               <a:spcBef>
                 <a:spcPts val="0"/>
@@ -6738,7 +6828,7 @@
           <a:p>
             <a:pPr algn="l">
               <a:lnSpc>
-                <a:spcPts val="1330"/>
+                <a:spcPts val="1363"/>
               </a:lnSpc>
               <a:spcBef>
                 <a:spcPts val="0"/>
@@ -6857,7 +6947,7 @@
         </p:nvSpPr>
         <p:spPr>
           <a:xfrm>
-            <a:off x="5186477" y="5401854"/>
+            <a:off x="5186477" y="5427611"/>
             <a:ext cx="457200" cy="457200"/>
           </a:xfrm>
           <a:prstGeom prst="homePlate">
@@ -6901,8 +6991,8 @@
         </p:nvSpPr>
         <p:spPr>
           <a:xfrm>
-            <a:off x="5698541" y="5354912"/>
-            <a:ext cx="2002942" cy="354732"/>
+            <a:off x="5698541" y="5374123"/>
+            <a:ext cx="2002942" cy="363600"/>
           </a:xfrm>
           <a:prstGeom prst="rect">
             <a:avLst/>
@@ -6917,7 +7007,7 @@
           <a:p>
             <a:pPr algn="ctr">
               <a:lnSpc>
-                <a:spcPts val="2793"/>
+                <a:spcPts val="2862"/>
               </a:lnSpc>
               <a:spcBef>
                 <a:spcPts val="0"/>
@@ -6946,8 +7036,8 @@
         </p:nvSpPr>
         <p:spPr>
           <a:xfrm>
-            <a:off x="5698541" y="5737076"/>
-            <a:ext cx="2002942" cy="168920"/>
+            <a:off x="5698541" y="5765155"/>
+            <a:ext cx="2002942" cy="173143"/>
           </a:xfrm>
           <a:prstGeom prst="rect">
             <a:avLst/>
@@ -6962,7 +7052,7 @@
           <a:p>
             <a:pPr algn="ctr">
               <a:lnSpc>
-                <a:spcPts val="1330"/>
+                <a:spcPts val="1363"/>
               </a:lnSpc>
               <a:spcBef>
                 <a:spcPts val="0"/>
@@ -7009,8 +7099,8 @@
         </p:nvSpPr>
         <p:spPr>
           <a:xfrm>
-            <a:off x="7738059" y="5354912"/>
-            <a:ext cx="2002942" cy="354732"/>
+            <a:off x="7738059" y="5374123"/>
+            <a:ext cx="2002942" cy="363600"/>
           </a:xfrm>
           <a:prstGeom prst="rect">
             <a:avLst/>
@@ -7025,7 +7115,7 @@
           <a:p>
             <a:pPr algn="ctr">
               <a:lnSpc>
-                <a:spcPts val="2793"/>
+                <a:spcPts val="2862"/>
               </a:lnSpc>
               <a:spcBef>
                 <a:spcPts val="0"/>
@@ -7054,8 +7144,8 @@
         </p:nvSpPr>
         <p:spPr>
           <a:xfrm>
-            <a:off x="7738059" y="5737076"/>
-            <a:ext cx="2002942" cy="168920"/>
+            <a:off x="7738059" y="5765155"/>
+            <a:ext cx="2002942" cy="173143"/>
           </a:xfrm>
           <a:prstGeom prst="rect">
             <a:avLst/>
@@ -7070,7 +7160,7 @@
           <a:p>
             <a:pPr algn="ctr">
               <a:lnSpc>
-                <a:spcPts val="1330"/>
+                <a:spcPts val="1363"/>
               </a:lnSpc>
               <a:spcBef>
                 <a:spcPts val="0"/>
@@ -7126,8 +7216,8 @@
         </p:nvSpPr>
         <p:spPr>
           <a:xfrm>
-            <a:off x="9777577" y="5354912"/>
-            <a:ext cx="2002943" cy="354732"/>
+            <a:off x="9777577" y="5374123"/>
+            <a:ext cx="2002943" cy="363600"/>
           </a:xfrm>
           <a:prstGeom prst="rect">
             <a:avLst/>
@@ -7142,7 +7232,7 @@
           <a:p>
             <a:pPr algn="ctr">
               <a:lnSpc>
-                <a:spcPts val="2793"/>
+                <a:spcPts val="2862"/>
               </a:lnSpc>
               <a:spcBef>
                 <a:spcPts val="0"/>
@@ -7171,8 +7261,8 @@
         </p:nvSpPr>
         <p:spPr>
           <a:xfrm>
-            <a:off x="9777577" y="5737076"/>
-            <a:ext cx="2002943" cy="168920"/>
+            <a:off x="9777577" y="5765155"/>
+            <a:ext cx="2002943" cy="173143"/>
           </a:xfrm>
           <a:prstGeom prst="rect">
             <a:avLst/>
@@ -7187,7 +7277,7 @@
           <a:p>
             <a:pPr algn="ctr">
               <a:lnSpc>
-                <a:spcPts val="1330"/>
+                <a:spcPts val="1363"/>
               </a:lnSpc>
               <a:spcBef>
                 <a:spcPts val="0"/>
@@ -7243,7 +7333,7 @@
         </p:nvCxnSpPr>
         <p:spPr>
           <a:xfrm>
-            <a:off x="7719771" y="5218974"/>
+            <a:off x="7719771" y="5244731"/>
             <a:ext cx="0" cy="822960"/>
           </a:xfrm>
           <a:prstGeom prst="line">
@@ -7279,7 +7369,7 @@
         </p:nvCxnSpPr>
         <p:spPr>
           <a:xfrm>
-            <a:off x="9759289" y="5218974"/>
+            <a:off x="9759289" y="5244731"/>
             <a:ext cx="0" cy="822960"/>
           </a:xfrm>
           <a:prstGeom prst="line">
@@ -7315,8 +7405,8 @@
         </p:nvSpPr>
         <p:spPr>
           <a:xfrm>
-            <a:off x="411480" y="6128802"/>
-            <a:ext cx="11369040" cy="143582"/>
+            <a:off x="411480" y="6154559"/>
+            <a:ext cx="11369040" cy="147171"/>
           </a:xfrm>
           <a:prstGeom prst="rect">
             <a:avLst/>
@@ -7331,7 +7421,7 @@
           <a:p>
             <a:pPr algn="l">
               <a:lnSpc>
-                <a:spcPts val="1130"/>
+                <a:spcPts val="1158"/>
               </a:lnSpc>
               <a:spcBef>
                 <a:spcPts val="0"/>
